--- a/PPT_Notes/Unit-4_Backtracking_Branch_and_Bound/Unit-4_Backtracking_Branch_and_Bound_compressed.pptx
+++ b/PPT_Notes/Unit-4_Backtracking_Branch_and_Bound/Unit-4_Backtracking_Branch_and_Bound_compressed.pptx
@@ -17805,77 +17805,98 @@
           </a:p>
         </p:txBody>
       </p:sp>
-      <p:pic>
-        <p:nvPicPr>
-          <p:cNvPr id="9" name="Picture 8">
+      <p:grpSp>
+        <p:nvGrpSpPr>
+          <p:cNvPr id="3" name="Group 2">
             <a:extLst>
               <a:ext uri="{FF2B5EF4-FFF2-40B4-BE49-F238E27FC236}">
-                <a16:creationId xmlns:a16="http://schemas.microsoft.com/office/drawing/2014/main" id="{02B7B121-3B99-8681-F2FE-BD9F51F387B7}"/>
+                <a16:creationId xmlns:a16="http://schemas.microsoft.com/office/drawing/2014/main" id="{2C0877E3-0091-CE8D-4EA2-8645A99F51A9}"/>
               </a:ext>
             </a:extLst>
           </p:cNvPr>
-          <p:cNvPicPr>
-            <a:picLocks noChangeAspect="1"/>
-          </p:cNvPicPr>
+          <p:cNvGrpSpPr/>
           <p:nvPr/>
-        </p:nvPicPr>
-        <p:blipFill>
-          <a:blip r:embed="rId2"/>
-          <a:srcRect r="7752"/>
-          <a:stretch>
-            <a:fillRect/>
-          </a:stretch>
-        </p:blipFill>
-        <p:spPr>
+        </p:nvGrpSpPr>
+        <p:grpSpPr>
           <a:xfrm>
             <a:off x="508001" y="1450975"/>
-            <a:ext cx="6106160" cy="3956050"/>
+            <a:ext cx="11327445" cy="3957002"/>
+            <a:chOff x="508001" y="1450975"/>
+            <a:chExt cx="11327445" cy="3957002"/>
           </a:xfrm>
-          <a:prstGeom prst="rect">
-            <a:avLst/>
-          </a:prstGeom>
-          <a:ln w="28575">
-            <a:solidFill>
-              <a:schemeClr val="accent1"/>
-            </a:solidFill>
-          </a:ln>
-        </p:spPr>
-      </p:pic>
-      <p:pic>
-        <p:nvPicPr>
-          <p:cNvPr id="11" name="Picture 10">
-            <a:extLst>
-              <a:ext uri="{FF2B5EF4-FFF2-40B4-BE49-F238E27FC236}">
-                <a16:creationId xmlns:a16="http://schemas.microsoft.com/office/drawing/2014/main" id="{9F753C99-2C4A-BE49-1CA9-D9B8A7358701}"/>
-              </a:ext>
-            </a:extLst>
-          </p:cNvPr>
-          <p:cNvPicPr>
-            <a:picLocks noChangeAspect="1"/>
-          </p:cNvPicPr>
-          <p:nvPr/>
-        </p:nvPicPr>
-        <p:blipFill>
-          <a:blip r:embed="rId3"/>
-          <a:stretch>
-            <a:fillRect/>
-          </a:stretch>
-        </p:blipFill>
-        <p:spPr>
-          <a:xfrm>
-            <a:off x="6948561" y="1451927"/>
-            <a:ext cx="4886885" cy="3956050"/>
-          </a:xfrm>
-          <a:prstGeom prst="rect">
-            <a:avLst/>
-          </a:prstGeom>
-          <a:ln w="28575">
-            <a:solidFill>
-              <a:schemeClr val="accent1"/>
-            </a:solidFill>
-          </a:ln>
-        </p:spPr>
-      </p:pic>
+        </p:grpSpPr>
+        <p:pic>
+          <p:nvPicPr>
+            <p:cNvPr id="9" name="Picture 8">
+              <a:extLst>
+                <a:ext uri="{FF2B5EF4-FFF2-40B4-BE49-F238E27FC236}">
+                  <a16:creationId xmlns:a16="http://schemas.microsoft.com/office/drawing/2014/main" id="{02B7B121-3B99-8681-F2FE-BD9F51F387B7}"/>
+                </a:ext>
+              </a:extLst>
+            </p:cNvPr>
+            <p:cNvPicPr>
+              <a:picLocks noChangeAspect="1"/>
+            </p:cNvPicPr>
+            <p:nvPr/>
+          </p:nvPicPr>
+          <p:blipFill>
+            <a:blip r:embed="rId2"/>
+            <a:srcRect r="7752"/>
+            <a:stretch>
+              <a:fillRect/>
+            </a:stretch>
+          </p:blipFill>
+          <p:spPr>
+            <a:xfrm>
+              <a:off x="508001" y="1450975"/>
+              <a:ext cx="6106160" cy="3956050"/>
+            </a:xfrm>
+            <a:prstGeom prst="rect">
+              <a:avLst/>
+            </a:prstGeom>
+            <a:ln w="28575">
+              <a:solidFill>
+                <a:schemeClr val="accent1"/>
+              </a:solidFill>
+            </a:ln>
+          </p:spPr>
+        </p:pic>
+        <p:pic>
+          <p:nvPicPr>
+            <p:cNvPr id="11" name="Picture 10">
+              <a:extLst>
+                <a:ext uri="{FF2B5EF4-FFF2-40B4-BE49-F238E27FC236}">
+                  <a16:creationId xmlns:a16="http://schemas.microsoft.com/office/drawing/2014/main" id="{9F753C99-2C4A-BE49-1CA9-D9B8A7358701}"/>
+                </a:ext>
+              </a:extLst>
+            </p:cNvPr>
+            <p:cNvPicPr>
+              <a:picLocks noChangeAspect="1"/>
+            </p:cNvPicPr>
+            <p:nvPr/>
+          </p:nvPicPr>
+          <p:blipFill>
+            <a:blip r:embed="rId3"/>
+            <a:stretch>
+              <a:fillRect/>
+            </a:stretch>
+          </p:blipFill>
+          <p:spPr>
+            <a:xfrm>
+              <a:off x="6948561" y="1451927"/>
+              <a:ext cx="4886885" cy="3956050"/>
+            </a:xfrm>
+            <a:prstGeom prst="rect">
+              <a:avLst/>
+            </a:prstGeom>
+            <a:ln w="28575">
+              <a:solidFill>
+                <a:schemeClr val="accent1"/>
+              </a:solidFill>
+            </a:ln>
+          </p:spPr>
+        </p:pic>
+      </p:grpSp>
       <p:sp>
         <p:nvSpPr>
           <p:cNvPr id="12" name="Title 1">
@@ -17892,7 +17913,7 @@
         </p:nvSpPr>
         <p:spPr>
           <a:xfrm>
-            <a:off x="929640" y="5887402"/>
+            <a:off x="736600" y="939482"/>
             <a:ext cx="10515600" cy="417195"/>
           </a:xfrm>
           <a:prstGeom prst="rect">
@@ -17930,13 +17951,60 @@
                   <a:srgbClr val="FF0000"/>
                 </a:solidFill>
               </a:rPr>
-              <a:t>Above algorithms will be applicable for both 4-Queens  &amp; 8-Queens Problem</a:t>
+              <a:t>Below algorithms will be applicable for both 4-Queens  &amp; 8-Queens Problem</a:t>
             </a:r>
             <a:endParaRPr lang="en-IN" sz="4000" dirty="0">
               <a:solidFill>
                 <a:srgbClr val="FF0000"/>
               </a:solidFill>
             </a:endParaRPr>
+          </a:p>
+        </p:txBody>
+      </p:sp>
+      <p:sp>
+        <p:nvSpPr>
+          <p:cNvPr id="5" name="TextBox 4">
+            <a:extLst>
+              <a:ext uri="{FF2B5EF4-FFF2-40B4-BE49-F238E27FC236}">
+                <a16:creationId xmlns:a16="http://schemas.microsoft.com/office/drawing/2014/main" id="{984AE57C-51AB-E765-2BE1-386930BB8EF8}"/>
+              </a:ext>
+            </a:extLst>
+          </p:cNvPr>
+          <p:cNvSpPr txBox="1"/>
+          <p:nvPr/>
+        </p:nvSpPr>
+        <p:spPr>
+          <a:xfrm>
+            <a:off x="990600" y="5695295"/>
+            <a:ext cx="10688320" cy="523220"/>
+          </a:xfrm>
+          <a:prstGeom prst="rect">
+            <a:avLst/>
+          </a:prstGeom>
+          <a:noFill/>
+        </p:spPr>
+        <p:txBody>
+          <a:bodyPr wrap="square">
+            <a:spAutoFit/>
+          </a:bodyPr>
+          <a:lstStyle/>
+          <a:p>
+            <a:r>
+              <a:rPr lang="en-IN" sz="1400" dirty="0"/>
+              <a:t>C Program Link: </a:t>
+            </a:r>
+          </a:p>
+          <a:p>
+            <a:r>
+              <a:rPr lang="en-IN" sz="1400" dirty="0">
+                <a:hlinkClick r:id="rId4"/>
+              </a:rPr>
+              <a:t>https://github.com/dayanandyadav205/CS-402-ADA/blob/main/PPT_Notes/Unit-4_Backtracking_Branch_and_Bound/N-Queens_Problem.c</a:t>
+            </a:r>
+            <a:r>
+              <a:rPr lang="en-IN" sz="1400" dirty="0"/>
+              <a:t> </a:t>
+            </a:r>
           </a:p>
         </p:txBody>
       </p:sp>
